--- a/entregaveis/apresentacao_tcc.pptx
+++ b/entregaveis/apresentacao_tcc.pptx
@@ -3960,7 +3960,7 @@
                 </a:solidFill>
                 <a:latin typeface="Calibri"/>
               </a:rPr>
-              <a:t>9. Logit Multinível — Gap de Oportunidades Racial</a:t>
+              <a:t>9. A barreira maior é a porta: 30% menos chance de cargo qualificado</a:t>
             </a:r>
           </a:p>
         </p:txBody>
@@ -4803,7 +4803,7 @@
                 </a:solidFill>
                 <a:latin typeface="Calibri"/>
               </a:rPr>
-              <a:t>10. Regressão Quantílica — Formalização do Glass Ceiling</a:t>
+              <a:t>10. Quanto mais alto o salário, maior a penalidade racial</a:t>
             </a:r>
           </a:p>
         </p:txBody>
@@ -5365,7 +5365,7 @@
                 </a:solidFill>
                 <a:latin typeface="Calibri"/>
               </a:rPr>
-              <a:t>11. RIF-OB — Sticky Floor Discriminatório vs. Glass Ceiling por Dotações</a:t>
+              <a:t>11. Na base da distribuição, a maior parte do gap é preço, não característica</a:t>
             </a:r>
           </a:p>
         </p:txBody>
@@ -6546,7 +6546,7 @@
                 </a:solidFill>
                 <a:latin typeface="Calibri"/>
               </a:rPr>
-              <a:t>12. Interseccionalidade — OB em 4 Grupos (Crenshaw, 1989)</a:t>
+              <a:t>12. A mulher negra acumula as duas penalidades — e sobra uma terceira</a:t>
             </a:r>
           </a:p>
         </p:txBody>
@@ -7399,7 +7399,7 @@
                 </a:solidFill>
                 <a:latin typeface="Calibri"/>
               </a:rPr>
-              <a:t>13. Sensibilidade — Konfound, E-values e Oster Bounds</a:t>
+              <a:t>13. Para derrubar o resultado, faltaria um confundidor mais forte que tudo o que medimos</a:t>
             </a:r>
           </a:p>
         </p:txBody>
@@ -8298,7 +8298,7 @@
                 </a:solidFill>
                 <a:latin typeface="Calibri"/>
               </a:rPr>
-              <a:t>15. ML/SHAP — O Que Mais Determina a Renda?</a:t>
+              <a:t>14. Sem impor forma funcional, a raça continua pesando na previsão da renda</a:t>
             </a:r>
           </a:p>
         </p:txBody>
@@ -8355,7 +8355,7 @@
         <p:spPr>
           <a:xfrm>
             <a:off x="274320" y="1097280"/>
-            <a:ext cx="6217920" cy="4609927"/>
+            <a:ext cx="6217920" cy="4413524"/>
           </a:xfrm>
           <a:prstGeom prst="rect">
             <a:avLst/>
@@ -9522,7 +9522,7 @@
                 </a:solidFill>
                 <a:latin typeface="Calibri"/>
               </a:rPr>
-              <a:t>20. Por Que Esses Modelos? — Justificação Estatística</a:t>
+              <a:t>15. Por que multinível: 37% da variação da renda está entre bairros</a:t>
             </a:r>
           </a:p>
         </p:txBody>
@@ -10358,7 +10358,7 @@
                 </a:solidFill>
                 <a:latin typeface="Calibri"/>
               </a:rPr>
-              <a:t>Resumo dos Resultados — Núcleo de 4 Métodos</a:t>
+              <a:t>Os quatro métodos apontam para o mesmo lugar</a:t>
             </a:r>
           </a:p>
         </p:txBody>
@@ -11157,7 +11157,7 @@
                 </a:solidFill>
                 <a:latin typeface="Calibri"/>
               </a:rPr>
-              <a:t>21. Síntese — Triângulo de Evidências</a:t>
+              <a:t>16. Duas barreiras, um sistema: porta de entrada e salário</a:t>
             </a:r>
           </a:p>
         </p:txBody>
@@ -12154,7 +12154,7 @@
                 </a:solidFill>
                 <a:latin typeface="Calibri"/>
               </a:rPr>
-              <a:t>27. Implicações de Política</a:t>
+              <a:t>17. Cotas de acesso e fiscalização atacam a barreira que medimos</a:t>
             </a:r>
           </a:p>
         </p:txBody>
@@ -13116,7 +13116,7 @@
                 </a:solidFill>
                 <a:latin typeface="Calibri"/>
               </a:rPr>
-              <a:t>1. O Problema</a:t>
+              <a:t>1. Mesma escolaridade, salário menor: o gap racial não é só qualificação</a:t>
             </a:r>
           </a:p>
         </p:txBody>
@@ -13769,7 +13769,7 @@
                 </a:solidFill>
                 <a:latin typeface="Calibri"/>
               </a:rPr>
-              <a:t>28. Limitações e Agenda Futura</a:t>
+              <a:t>18. O que estes números não dizem</a:t>
             </a:r>
           </a:p>
         </p:txBody>
@@ -15345,7 +15345,7 @@
                 </a:solidFill>
                 <a:latin typeface="Calibri"/>
               </a:rPr>
-              <a:t>2. Base de Dados</a:t>
+              <a:t>2. Dez anos de PNAD Contínua: 7,7 milhões de trabalhadores, 41 mil bairros</a:t>
             </a:r>
           </a:p>
         </p:txBody>
@@ -16604,7 +16604,7 @@
                 </a:solidFill>
                 <a:latin typeface="Calibri"/>
               </a:rPr>
-              <a:t>3. Análise Descritiva — A Desigualdade nos Dados</a:t>
+              <a:t>3. Antes de qualquer modelo: brancos e negros não moram nos mesmos bairros</a:t>
             </a:r>
           </a:p>
         </p:txBody>
@@ -17734,7 +17734,7 @@
                 </a:solidFill>
                 <a:latin typeface="Calibri"/>
               </a:rPr>
-              <a:t>4. Arquitetura Metodológica</a:t>
+              <a:t>4. Quatro métodos que respondem a quatro perguntas diferentes</a:t>
             </a:r>
           </a:p>
         </p:txBody>
@@ -19259,7 +19259,7 @@
                 </a:solidFill>
                 <a:latin typeface="Calibri"/>
               </a:rPr>
-              <a:t>5. HLM — Decomposição do Gap em Camadas</a:t>
+              <a:t>5. Metade do gap desaparece ao comparar pessoas do mesmo bairro</a:t>
             </a:r>
           </a:p>
         </p:txBody>
@@ -20319,7 +20319,7 @@
                 </a:solidFill>
                 <a:latin typeface="Calibri"/>
               </a:rPr>
-              <a:t>6. Composição Ocupacional — Onde Estão Negros e Brancos?</a:t>
+              <a:t>6. A ocupação explica muito — mas a ocupação é ela própria desigual</a:t>
             </a:r>
           </a:p>
         </p:txBody>
@@ -20687,7 +20687,7 @@
                 </a:solidFill>
                 <a:latin typeface="Calibri"/>
               </a:rPr>
-              <a:t>7. Oaxaca-Blinder — Onde Opera a Discriminação?</a:t>
+              <a:t>7. Tratar a ocupação como “característica” corta a discriminação medida pela metade</a:t>
             </a:r>
           </a:p>
         </p:txBody>
@@ -21201,7 +21201,7 @@
                 </a:solidFill>
                 <a:latin typeface="Calibri"/>
               </a:rPr>
-              <a:t>8. Gap por Subgrupo e Ciclo de Vida</a:t>
+              <a:t>8. A penalidade cresce com a idade e não poupa nenhum subgrupo</a:t>
             </a:r>
           </a:p>
         </p:txBody>

--- a/entregaveis/apresentacao_tcc.pptx
+++ b/entregaveis/apresentacao_tcc.pptx
@@ -20933,7 +20933,7 @@
         <p:spPr>
           <a:xfrm>
             <a:off x="1828800" y="3429000"/>
-            <a:ext cx="4369234" cy="731520"/>
+            <a:ext cx="4368183" cy="731520"/>
           </a:xfrm>
           <a:prstGeom prst="rect">
             <a:avLst/>
@@ -20973,7 +20973,7 @@
         </p:nvSpPr>
         <p:spPr>
           <a:xfrm>
-            <a:off x="6307762" y="3611880"/>
+            <a:off x="6306711" y="3611880"/>
             <a:ext cx="914400" cy="411480"/>
           </a:xfrm>
           <a:prstGeom prst="rect">
@@ -21044,7 +21044,7 @@
         </p:nvSpPr>
         <p:spPr>
           <a:xfrm>
-            <a:off x="7249594" y="3538728"/>
+            <a:off x="7248543" y="3538728"/>
             <a:ext cx="4206240" cy="566928"/>
           </a:xfrm>
           <a:prstGeom prst="rect">
